--- a/03-课件PPT/讲次版/第3章-5-讲次 3-5 · Harness、LangGraph 与.pptx
+++ b/03-课件PPT/讲次版/第3章-5-讲次 3-5 · Harness、LangGraph 与.pptx
@@ -35018,7 +35018,7 @@
           <a:noFill/>
         </p:spPr>
         <p:txBody>
-          <a:bodyPr wrap="none" anchor="ctr">
+          <a:bodyPr wrap="square" anchor="ctr">
             <a:spAutoFit/>
           </a:bodyPr>
           <a:lstStyle/>
@@ -35029,7 +35029,7 @@
               </a:lnSpc>
             </a:pPr>
             <a:r>
-              <a:rPr sz="1100" b="1">
+              <a:rPr sz="1300" b="1">
                 <a:solidFill>
                   <a:srgbClr val="0B1D3A"/>
                 </a:solidFill>
@@ -35400,7 +35400,7 @@
           <a:noFill/>
         </p:spPr>
         <p:txBody>
-          <a:bodyPr wrap="none" anchor="ctr">
+          <a:bodyPr wrap="square" anchor="ctr">
             <a:spAutoFit/>
           </a:bodyPr>
           <a:lstStyle/>
@@ -35411,7 +35411,7 @@
               </a:lnSpc>
             </a:pPr>
             <a:r>
-              <a:rPr sz="1100" b="1">
+              <a:rPr sz="1300" b="1">
                 <a:solidFill>
                   <a:srgbClr val="0B1D3A"/>
                 </a:solidFill>
@@ -35782,7 +35782,7 @@
           <a:noFill/>
         </p:spPr>
         <p:txBody>
-          <a:bodyPr wrap="none" anchor="ctr">
+          <a:bodyPr wrap="square" anchor="ctr">
             <a:spAutoFit/>
           </a:bodyPr>
           <a:lstStyle/>
@@ -35793,7 +35793,7 @@
               </a:lnSpc>
             </a:pPr>
             <a:r>
-              <a:rPr sz="900" b="1">
+              <a:rPr sz="1300" b="1">
                 <a:solidFill>
                   <a:srgbClr val="0B1D3A"/>
                 </a:solidFill>
@@ -36164,7 +36164,7 @@
           <a:noFill/>
         </p:spPr>
         <p:txBody>
-          <a:bodyPr wrap="none" anchor="ctr">
+          <a:bodyPr wrap="square" anchor="ctr">
             <a:spAutoFit/>
           </a:bodyPr>
           <a:lstStyle/>
@@ -36175,7 +36175,7 @@
               </a:lnSpc>
             </a:pPr>
             <a:r>
-              <a:rPr sz="1100" b="1">
+              <a:rPr sz="1300" b="1">
                 <a:solidFill>
                   <a:srgbClr val="0B1D3A"/>
                 </a:solidFill>
@@ -36459,7 +36459,7 @@
           <a:noFill/>
         </p:spPr>
         <p:txBody>
-          <a:bodyPr wrap="none" anchor="ctr">
+          <a:bodyPr wrap="square" anchor="ctr">
             <a:spAutoFit/>
           </a:bodyPr>
           <a:lstStyle/>
@@ -36470,7 +36470,7 @@
               </a:lnSpc>
             </a:pPr>
             <a:r>
-              <a:rPr sz="1100" b="1">
+              <a:rPr sz="1300" b="1">
                 <a:solidFill>
                   <a:srgbClr val="0B1D3A"/>
                 </a:solidFill>
